--- a/report_n_presentation/Spatio-Temporal Analysis of Road Traffic Crashes in Kenya.pptx
+++ b/report_n_presentation/Spatio-Temporal Analysis of Road Traffic Crashes in Kenya.pptx
@@ -5,7 +5,7 @@
     <p:sldMasterId id="2147483784" r:id="rId1"/>
   </p:sldMasterIdLst>
   <p:notesMasterIdLst>
-    <p:notesMasterId r:id="rId24"/>
+    <p:notesMasterId r:id="rId25"/>
   </p:notesMasterIdLst>
   <p:sldIdLst>
     <p:sldId id="256" r:id="rId2"/>
@@ -28,8 +28,9 @@
     <p:sldId id="274" r:id="rId19"/>
     <p:sldId id="275" r:id="rId20"/>
     <p:sldId id="276" r:id="rId21"/>
-    <p:sldId id="277" r:id="rId22"/>
-    <p:sldId id="278" r:id="rId23"/>
+    <p:sldId id="279" r:id="rId22"/>
+    <p:sldId id="277" r:id="rId23"/>
+    <p:sldId id="278" r:id="rId24"/>
   </p:sldIdLst>
   <p:sldSz cx="12192000" cy="6858000"/>
   <p:notesSz cx="6858000" cy="9144000"/>
@@ -218,7 +219,7 @@
           <a:p>
             <a:fld id="{CDA22E76-1C7B-49B6-A026-89A208766BEC}" type="datetimeFigureOut">
               <a:rPr lang="en-US" smtClean="0"/>
-              <a:t>12/26/2025</a:t>
+              <a:t>2/5/2026</a:t>
             </a:fld>
             <a:endParaRPr lang="en-US"/>
           </a:p>
@@ -862,7 +863,7 @@
           <a:p>
             <a:fld id="{E2041248-3A39-4E12-9E62-DEE22AB4EED7}" type="datetimeFigureOut">
               <a:rPr lang="en-US" smtClean="0"/>
-              <a:t>12/26/2025</a:t>
+              <a:t>2/5/2026</a:t>
             </a:fld>
             <a:endParaRPr lang="en-US"/>
           </a:p>
@@ -1052,7 +1053,7 @@
           <a:p>
             <a:fld id="{E2041248-3A39-4E12-9E62-DEE22AB4EED7}" type="datetimeFigureOut">
               <a:rPr lang="en-US" smtClean="0"/>
-              <a:t>12/26/2025</a:t>
+              <a:t>2/5/2026</a:t>
             </a:fld>
             <a:endParaRPr lang="en-US"/>
           </a:p>
@@ -1232,7 +1233,7 @@
           <a:p>
             <a:fld id="{E2041248-3A39-4E12-9E62-DEE22AB4EED7}" type="datetimeFigureOut">
               <a:rPr lang="en-US" smtClean="0"/>
-              <a:t>12/26/2025</a:t>
+              <a:t>2/5/2026</a:t>
             </a:fld>
             <a:endParaRPr lang="en-US"/>
           </a:p>
@@ -1402,7 +1403,7 @@
           <a:p>
             <a:fld id="{E2041248-3A39-4E12-9E62-DEE22AB4EED7}" type="datetimeFigureOut">
               <a:rPr lang="en-US" smtClean="0"/>
-              <a:t>12/26/2025</a:t>
+              <a:t>2/5/2026</a:t>
             </a:fld>
             <a:endParaRPr lang="en-US"/>
           </a:p>
@@ -1658,7 +1659,7 @@
           <a:p>
             <a:fld id="{E2041248-3A39-4E12-9E62-DEE22AB4EED7}" type="datetimeFigureOut">
               <a:rPr lang="en-US" smtClean="0"/>
-              <a:t>12/26/2025</a:t>
+              <a:t>2/5/2026</a:t>
             </a:fld>
             <a:endParaRPr lang="en-US"/>
           </a:p>
@@ -1946,7 +1947,7 @@
           <a:p>
             <a:fld id="{E2041248-3A39-4E12-9E62-DEE22AB4EED7}" type="datetimeFigureOut">
               <a:rPr lang="en-US" smtClean="0"/>
-              <a:t>12/26/2025</a:t>
+              <a:t>2/5/2026</a:t>
             </a:fld>
             <a:endParaRPr lang="en-US"/>
           </a:p>
@@ -2384,7 +2385,7 @@
           <a:p>
             <a:fld id="{E2041248-3A39-4E12-9E62-DEE22AB4EED7}" type="datetimeFigureOut">
               <a:rPr lang="en-US" smtClean="0"/>
-              <a:t>12/26/2025</a:t>
+              <a:t>2/5/2026</a:t>
             </a:fld>
             <a:endParaRPr lang="en-US"/>
           </a:p>
@@ -2502,7 +2503,7 @@
           <a:p>
             <a:fld id="{E2041248-3A39-4E12-9E62-DEE22AB4EED7}" type="datetimeFigureOut">
               <a:rPr lang="en-US" smtClean="0"/>
-              <a:t>12/26/2025</a:t>
+              <a:t>2/5/2026</a:t>
             </a:fld>
             <a:endParaRPr lang="en-US"/>
           </a:p>
@@ -2597,7 +2598,7 @@
           <a:p>
             <a:fld id="{E2041248-3A39-4E12-9E62-DEE22AB4EED7}" type="datetimeFigureOut">
               <a:rPr lang="en-US" smtClean="0"/>
-              <a:t>12/26/2025</a:t>
+              <a:t>2/5/2026</a:t>
             </a:fld>
             <a:endParaRPr lang="en-US"/>
           </a:p>
@@ -2953,7 +2954,7 @@
           <a:p>
             <a:fld id="{E2041248-3A39-4E12-9E62-DEE22AB4EED7}" type="datetimeFigureOut">
               <a:rPr lang="en-US" smtClean="0"/>
-              <a:t>12/26/2025</a:t>
+              <a:t>2/5/2026</a:t>
             </a:fld>
             <a:endParaRPr lang="en-US"/>
           </a:p>
@@ -3269,7 +3270,7 @@
           <a:p>
             <a:fld id="{E2041248-3A39-4E12-9E62-DEE22AB4EED7}" type="datetimeFigureOut">
               <a:rPr lang="en-US" smtClean="0"/>
-              <a:t>12/26/2025</a:t>
+              <a:t>2/5/2026</a:t>
             </a:fld>
             <a:endParaRPr lang="en-US"/>
           </a:p>
@@ -3502,7 +3503,7 @@
           <a:p>
             <a:fld id="{E2041248-3A39-4E12-9E62-DEE22AB4EED7}" type="datetimeFigureOut">
               <a:rPr lang="en-US" smtClean="0"/>
-              <a:t>12/26/2025</a:t>
+              <a:t>2/5/2026</a:t>
             </a:fld>
             <a:endParaRPr lang="en-US"/>
           </a:p>
@@ -3986,7 +3987,7 @@
                 <a:ea typeface="Calibri" panose="020F0502020204030204" pitchFamily="34" charset="0"/>
                 <a:cs typeface="Calibri" panose="020F0502020204030204" pitchFamily="34" charset="0"/>
               </a:rPr>
-              <a:t>-Temporal Analysis of Road Traffic Crashes in Kenya: Evidence from Geo-Referenced Accident Reports</a:t>
+              <a:t>-Temporal Analysis of Road Traffic Crashes in Kenya: Evidence from Geo-Referenced Accident Reports (2017-2018)</a:t>
             </a:r>
           </a:p>
         </p:txBody>
@@ -7628,7 +7629,7 @@
                 <a:latin typeface="Times New Roman" panose="02020603050405020304" pitchFamily="18" charset="0"/>
                 <a:cs typeface="Times New Roman" panose="02020603050405020304" pitchFamily="18" charset="0"/>
               </a:rPr>
-              <a:t>Spatial Analysis Findings</a:t>
+              <a:t>Spatial Analysis Results</a:t>
             </a:r>
           </a:p>
         </p:txBody>
@@ -7998,8 +7999,8 @@
           </a:p>
         </p:txBody>
       </p:sp>
-      <mc:AlternateContent xmlns:mc="http://schemas.openxmlformats.org/markup-compatibility/2006">
-        <mc:Choice xmlns:a14="http://schemas.microsoft.com/office/drawing/2010/main" Requires="a14">
+      <mc:AlternateContent xmlns:mc="http://schemas.openxmlformats.org/markup-compatibility/2006" xmlns:a14="http://schemas.microsoft.com/office/drawing/2010/main">
+        <mc:Choice Requires="a14">
           <p:sp>
             <p:nvSpPr>
               <p:cNvPr id="3" name="TextBox 2">
@@ -8094,6 +8095,7 @@
                 </a:endParaRPr>
               </a:p>
               <a:p>
+                <a:pPr/>
                 <a14:m>
                   <m:oMathPara xmlns:m="http://schemas.openxmlformats.org/officeDocument/2006/math">
                     <m:oMathParaPr>
@@ -8451,7 +8453,7 @@
             </p:txBody>
           </p:sp>
         </mc:Choice>
-        <mc:Fallback>
+        <mc:Fallback xmlns="">
           <p:sp>
             <p:nvSpPr>
               <p:cNvPr id="3" name="TextBox 2">
@@ -13111,7 +13113,7 @@
         </p:spPr>
         <p:txBody>
           <a:bodyPr>
-            <a:normAutofit fontScale="70000" lnSpcReduction="20000"/>
+            <a:normAutofit/>
           </a:bodyPr>
           <a:lstStyle/>
           <a:p>
@@ -13120,7 +13122,7 @@
               <a:buChar char="•"/>
             </a:pPr>
             <a:r>
-              <a:rPr lang="en-US" sz="4000" dirty="0">
+              <a:rPr lang="en-US" sz="2800" dirty="0">
                 <a:latin typeface="Times New Roman" panose="02020603050405020304" pitchFamily="18" charset="0"/>
                 <a:cs typeface="Times New Roman" panose="02020603050405020304" pitchFamily="18" charset="0"/>
               </a:rPr>
@@ -13133,7 +13135,7 @@
               <a:buChar char="•"/>
             </a:pPr>
             <a:r>
-              <a:rPr lang="en-US" sz="4000" dirty="0">
+              <a:rPr lang="en-US" sz="2800" dirty="0">
                 <a:latin typeface="Times New Roman" panose="02020603050405020304" pitchFamily="18" charset="0"/>
                 <a:cs typeface="Times New Roman" panose="02020603050405020304" pitchFamily="18" charset="0"/>
               </a:rPr>
@@ -13146,7 +13148,7 @@
               <a:buChar char="•"/>
             </a:pPr>
             <a:r>
-              <a:rPr lang="en-US" sz="4000" dirty="0">
+              <a:rPr lang="en-US" sz="2800" dirty="0">
                 <a:latin typeface="Times New Roman" panose="02020603050405020304" pitchFamily="18" charset="0"/>
                 <a:cs typeface="Times New Roman" panose="02020603050405020304" pitchFamily="18" charset="0"/>
               </a:rPr>
@@ -13159,7 +13161,7 @@
               <a:buChar char="•"/>
             </a:pPr>
             <a:r>
-              <a:rPr lang="en-US" sz="4000" dirty="0">
+              <a:rPr lang="en-US" sz="2800" dirty="0">
                 <a:latin typeface="Times New Roman" panose="02020603050405020304" pitchFamily="18" charset="0"/>
                 <a:cs typeface="Times New Roman" panose="02020603050405020304" pitchFamily="18" charset="0"/>
               </a:rPr>
@@ -13172,7 +13174,7 @@
               <a:buChar char="•"/>
             </a:pPr>
             <a:r>
-              <a:rPr lang="en-US" sz="4000" dirty="0">
+              <a:rPr lang="en-US" sz="2800" dirty="0">
                 <a:latin typeface="Times New Roman" panose="02020603050405020304" pitchFamily="18" charset="0"/>
                 <a:cs typeface="Times New Roman" panose="02020603050405020304" pitchFamily="18" charset="0"/>
               </a:rPr>
@@ -13185,7 +13187,7 @@
               <a:buChar char="•"/>
             </a:pPr>
             <a:r>
-              <a:rPr lang="en-US" sz="4000" dirty="0">
+              <a:rPr lang="en-US" sz="2800" dirty="0">
                 <a:latin typeface="Times New Roman" panose="02020603050405020304" pitchFamily="18" charset="0"/>
                 <a:cs typeface="Times New Roman" panose="02020603050405020304" pitchFamily="18" charset="0"/>
               </a:rPr>
@@ -13193,64 +13195,12 @@
             </a:r>
           </a:p>
           <a:p>
-            <a:pPr lvl="1">
-              <a:buFont typeface="Arial" panose="020B0604020202020204" pitchFamily="34" charset="0"/>
-              <a:buChar char="•"/>
-            </a:pPr>
-            <a:r>
-              <a:rPr lang="en-US" sz="2500" dirty="0">
-                <a:latin typeface="Times New Roman" panose="02020603050405020304" pitchFamily="18" charset="0"/>
-                <a:cs typeface="Times New Roman" panose="02020603050405020304" pitchFamily="18" charset="0"/>
-              </a:rPr>
-              <a:t>Descriptive Results</a:t>
-            </a:r>
-          </a:p>
-          <a:p>
-            <a:pPr lvl="1">
-              <a:buFont typeface="Arial" panose="020B0604020202020204" pitchFamily="34" charset="0"/>
-              <a:buChar char="•"/>
-            </a:pPr>
-            <a:r>
-              <a:rPr lang="en-US" sz="2500" dirty="0">
-                <a:latin typeface="Times New Roman" panose="02020603050405020304" pitchFamily="18" charset="0"/>
-                <a:cs typeface="Times New Roman" panose="02020603050405020304" pitchFamily="18" charset="0"/>
-              </a:rPr>
-              <a:t>Spatial Distribution</a:t>
-            </a:r>
-          </a:p>
-          <a:p>
-            <a:pPr lvl="1">
-              <a:buFont typeface="Arial" panose="020B0604020202020204" pitchFamily="34" charset="0"/>
-              <a:buChar char="•"/>
-            </a:pPr>
-            <a:r>
-              <a:rPr lang="en-US" sz="2500" dirty="0">
-                <a:latin typeface="Times New Roman" panose="02020603050405020304" pitchFamily="18" charset="0"/>
-                <a:cs typeface="Times New Roman" panose="02020603050405020304" pitchFamily="18" charset="0"/>
-              </a:rPr>
-              <a:t>Correlation Analysis</a:t>
-            </a:r>
-          </a:p>
-          <a:p>
-            <a:pPr lvl="1">
-              <a:buFont typeface="Arial" panose="020B0604020202020204" pitchFamily="34" charset="0"/>
-              <a:buChar char="•"/>
-            </a:pPr>
-            <a:r>
-              <a:rPr lang="en-US" sz="2500" dirty="0">
-                <a:latin typeface="Times New Roman" panose="02020603050405020304" pitchFamily="18" charset="0"/>
-                <a:cs typeface="Times New Roman" panose="02020603050405020304" pitchFamily="18" charset="0"/>
-              </a:rPr>
-              <a:t>Logistic Regression Results</a:t>
-            </a:r>
-          </a:p>
-          <a:p>
             <a:pPr>
               <a:buFont typeface="Arial" panose="020B0604020202020204" pitchFamily="34" charset="0"/>
               <a:buChar char="•"/>
             </a:pPr>
             <a:r>
-              <a:rPr lang="en-US" sz="4000" dirty="0">
+              <a:rPr lang="en-US" sz="2800" dirty="0">
                 <a:latin typeface="Times New Roman" panose="02020603050405020304" pitchFamily="18" charset="0"/>
                 <a:cs typeface="Times New Roman" panose="02020603050405020304" pitchFamily="18" charset="0"/>
               </a:rPr>
@@ -13263,7 +13213,7 @@
               <a:buChar char="•"/>
             </a:pPr>
             <a:r>
-              <a:rPr lang="en-US" sz="4000" dirty="0">
+              <a:rPr lang="en-US" sz="2800" dirty="0">
                 <a:latin typeface="Times New Roman" panose="02020603050405020304" pitchFamily="18" charset="0"/>
                 <a:cs typeface="Times New Roman" panose="02020603050405020304" pitchFamily="18" charset="0"/>
               </a:rPr>
@@ -13276,7 +13226,7 @@
               <a:buChar char="•"/>
             </a:pPr>
             <a:r>
-              <a:rPr lang="en-US" sz="4000" dirty="0">
+              <a:rPr lang="en-US" sz="2800" dirty="0">
                 <a:latin typeface="Times New Roman" panose="02020603050405020304" pitchFamily="18" charset="0"/>
                 <a:cs typeface="Times New Roman" panose="02020603050405020304" pitchFamily="18" charset="0"/>
               </a:rPr>
@@ -13376,7 +13326,7 @@
         </p:nvSpPr>
         <p:spPr>
           <a:xfrm>
-            <a:off x="552450" y="1095375"/>
+            <a:off x="552450" y="1006881"/>
             <a:ext cx="10201275" cy="5170646"/>
           </a:xfrm>
           <a:prstGeom prst="rect">
@@ -13545,6 +13495,354 @@
 </file>
 
 <file path=ppt/slides/slide21.xml><?xml version="1.0" encoding="utf-8"?>
+<p:sld xmlns:a="http://schemas.openxmlformats.org/drawingml/2006/main" xmlns:r="http://schemas.openxmlformats.org/officeDocument/2006/relationships" xmlns:p="http://schemas.openxmlformats.org/presentationml/2006/main">
+  <p:cSld>
+    <p:spTree>
+      <p:nvGrpSpPr>
+        <p:cNvPr id="1" name=""/>
+        <p:cNvGrpSpPr/>
+        <p:nvPr/>
+      </p:nvGrpSpPr>
+      <p:grpSpPr>
+        <a:xfrm>
+          <a:off x="0" y="0"/>
+          <a:ext cx="0" cy="0"/>
+          <a:chOff x="0" y="0"/>
+          <a:chExt cx="0" cy="0"/>
+        </a:xfrm>
+      </p:grpSpPr>
+      <p:sp>
+        <p:nvSpPr>
+          <p:cNvPr id="2" name="Title 1">
+            <a:extLst>
+              <a:ext uri="{FF2B5EF4-FFF2-40B4-BE49-F238E27FC236}">
+                <a16:creationId xmlns:a16="http://schemas.microsoft.com/office/drawing/2014/main" id="{3592366C-C504-1F19-EF12-67DD3489FD47}"/>
+              </a:ext>
+            </a:extLst>
+          </p:cNvPr>
+          <p:cNvSpPr>
+            <a:spLocks noGrp="1"/>
+          </p:cNvSpPr>
+          <p:nvPr>
+            <p:ph type="title"/>
+          </p:nvPr>
+        </p:nvSpPr>
+        <p:spPr/>
+        <p:txBody>
+          <a:bodyPr/>
+          <a:lstStyle/>
+          <a:p>
+            <a:r>
+              <a:rPr lang="en-US" dirty="0"/>
+              <a:t>Limitations of the study</a:t>
+            </a:r>
+          </a:p>
+        </p:txBody>
+      </p:sp>
+      <p:sp>
+        <p:nvSpPr>
+          <p:cNvPr id="6" name="TextBox 5">
+            <a:extLst>
+              <a:ext uri="{FF2B5EF4-FFF2-40B4-BE49-F238E27FC236}">
+                <a16:creationId xmlns:a16="http://schemas.microsoft.com/office/drawing/2014/main" id="{47555AC4-290F-1EAB-D846-2D6D08EE0C0A}"/>
+              </a:ext>
+            </a:extLst>
+          </p:cNvPr>
+          <p:cNvSpPr txBox="1"/>
+          <p:nvPr/>
+        </p:nvSpPr>
+        <p:spPr>
+          <a:xfrm>
+            <a:off x="1838633" y="3195484"/>
+            <a:ext cx="8170606" cy="2153264"/>
+          </a:xfrm>
+          <a:prstGeom prst="rect">
+            <a:avLst/>
+          </a:prstGeom>
+          <a:noFill/>
+        </p:spPr>
+        <p:txBody>
+          <a:bodyPr wrap="square" rtlCol="0">
+            <a:spAutoFit/>
+          </a:bodyPr>
+          <a:lstStyle/>
+          <a:p>
+            <a:endParaRPr lang="en-US" dirty="0"/>
+          </a:p>
+        </p:txBody>
+      </p:sp>
+      <p:sp>
+        <p:nvSpPr>
+          <p:cNvPr id="7" name="Rectangle 1">
+            <a:extLst>
+              <a:ext uri="{FF2B5EF4-FFF2-40B4-BE49-F238E27FC236}">
+                <a16:creationId xmlns:a16="http://schemas.microsoft.com/office/drawing/2014/main" id="{2B867EA6-2D3F-579A-9E8E-29B49F68B7E4}"/>
+              </a:ext>
+            </a:extLst>
+          </p:cNvPr>
+          <p:cNvSpPr>
+            <a:spLocks noChangeArrowheads="1"/>
+          </p:cNvSpPr>
+          <p:nvPr/>
+        </p:nvSpPr>
+        <p:spPr bwMode="auto">
+          <a:xfrm>
+            <a:off x="553984" y="1804220"/>
+            <a:ext cx="10979253" cy="3586366"/>
+          </a:xfrm>
+          <a:prstGeom prst="rect">
+            <a:avLst/>
+          </a:prstGeom>
+          <a:noFill/>
+          <a:ln>
+            <a:noFill/>
+          </a:ln>
+          <a:effectLst/>
+          <a:extLst>
+            <a:ext uri="{909E8E84-426E-40DD-AFC4-6F175D3DCCD1}">
+              <a14:hiddenFill xmlns:a14="http://schemas.microsoft.com/office/drawing/2010/main">
+                <a:solidFill>
+                  <a:schemeClr val="accent1"/>
+                </a:solidFill>
+              </a14:hiddenFill>
+            </a:ext>
+            <a:ext uri="{91240B29-F687-4F45-9708-019B960494DF}">
+              <a14:hiddenLine xmlns:a14="http://schemas.microsoft.com/office/drawing/2010/main" w="9525">
+                <a:solidFill>
+                  <a:schemeClr val="tx1"/>
+                </a:solidFill>
+                <a:miter lim="800000"/>
+                <a:headEnd/>
+                <a:tailEnd/>
+              </a14:hiddenLine>
+            </a:ext>
+            <a:ext uri="{AF507438-7753-43E0-B8FC-AC1667EBCBE1}">
+              <a14:hiddenEffects xmlns:a14="http://schemas.microsoft.com/office/drawing/2010/main">
+                <a:effectLst>
+                  <a:outerShdw dist="35921" dir="2700000" algn="ctr" rotWithShape="0">
+                    <a:schemeClr val="bg2"/>
+                  </a:outerShdw>
+                </a:effectLst>
+              </a14:hiddenEffects>
+            </a:ext>
+          </a:extLst>
+        </p:spPr>
+        <p:txBody>
+          <a:bodyPr vert="horz" wrap="square" lIns="91440" tIns="45720" rIns="91440" bIns="45720" numCol="1" anchor="ctr" anchorCtr="0" compatLnSpc="1">
+            <a:prstTxWarp prst="textNoShape">
+              <a:avLst/>
+            </a:prstTxWarp>
+            <a:spAutoFit/>
+          </a:bodyPr>
+          <a:lstStyle/>
+          <a:p>
+            <a:pPr marL="0" marR="0" lvl="0" indent="0" algn="l" defTabSz="914400" rtl="0" eaLnBrk="0" fontAlgn="base" latinLnBrk="0" hangingPunct="0">
+              <a:lnSpc>
+                <a:spcPct val="150000"/>
+              </a:lnSpc>
+              <a:spcBef>
+                <a:spcPct val="0"/>
+              </a:spcBef>
+              <a:spcAft>
+                <a:spcPct val="0"/>
+              </a:spcAft>
+              <a:buClrTx/>
+              <a:buSzTx/>
+              <a:buFontTx/>
+              <a:buChar char="•"/>
+              <a:tabLst/>
+            </a:pPr>
+            <a:r>
+              <a:rPr kumimoji="0" lang="en-US" altLang="en-US" sz="2200" b="0" i="0" u="none" strike="noStrike" cap="none" normalizeH="0" baseline="0" dirty="0">
+                <a:ln>
+                  <a:noFill/>
+                </a:ln>
+                <a:solidFill>
+                  <a:schemeClr val="tx1"/>
+                </a:solidFill>
+                <a:effectLst/>
+                <a:latin typeface="Times New Roman" panose="02020603050405020304" pitchFamily="18" charset="0"/>
+                <a:cs typeface="Times New Roman" panose="02020603050405020304" pitchFamily="18" charset="0"/>
+              </a:rPr>
+              <a:t>Relies on secondary, crowdsourced Ma3Route data → possible underreporting and reporting bias</a:t>
+            </a:r>
+          </a:p>
+          <a:p>
+            <a:pPr marL="0" marR="0" lvl="0" indent="0" algn="l" defTabSz="914400" rtl="0" eaLnBrk="0" fontAlgn="base" latinLnBrk="0" hangingPunct="0">
+              <a:lnSpc>
+                <a:spcPct val="150000"/>
+              </a:lnSpc>
+              <a:spcBef>
+                <a:spcPct val="0"/>
+              </a:spcBef>
+              <a:spcAft>
+                <a:spcPct val="0"/>
+              </a:spcAft>
+              <a:buClrTx/>
+              <a:buSzTx/>
+              <a:buFontTx/>
+              <a:buChar char="•"/>
+              <a:tabLst/>
+            </a:pPr>
+            <a:r>
+              <a:rPr kumimoji="0" lang="en-US" altLang="en-US" sz="2200" b="0" i="0" u="none" strike="noStrike" cap="none" normalizeH="0" baseline="0" dirty="0">
+                <a:ln>
+                  <a:noFill/>
+                </a:ln>
+                <a:solidFill>
+                  <a:schemeClr val="tx1"/>
+                </a:solidFill>
+                <a:effectLst/>
+                <a:latin typeface="Times New Roman" panose="02020603050405020304" pitchFamily="18" charset="0"/>
+                <a:cs typeface="Times New Roman" panose="02020603050405020304" pitchFamily="18" charset="0"/>
+              </a:rPr>
+              <a:t>Lacks official police/hospital records → fatalities and injuries not medically verified</a:t>
+            </a:r>
+          </a:p>
+          <a:p>
+            <a:pPr marL="0" marR="0" lvl="0" indent="0" algn="l" defTabSz="914400" rtl="0" eaLnBrk="0" fontAlgn="base" latinLnBrk="0" hangingPunct="0">
+              <a:lnSpc>
+                <a:spcPct val="150000"/>
+              </a:lnSpc>
+              <a:spcBef>
+                <a:spcPct val="0"/>
+              </a:spcBef>
+              <a:spcAft>
+                <a:spcPct val="0"/>
+              </a:spcAft>
+              <a:buClrTx/>
+              <a:buSzTx/>
+              <a:buFontTx/>
+              <a:buChar char="•"/>
+              <a:tabLst/>
+            </a:pPr>
+            <a:r>
+              <a:rPr kumimoji="0" lang="en-US" altLang="en-US" sz="2200" b="0" i="0" u="none" strike="noStrike" cap="none" normalizeH="0" baseline="0" dirty="0">
+                <a:ln>
+                  <a:noFill/>
+                </a:ln>
+                <a:solidFill>
+                  <a:schemeClr val="tx1"/>
+                </a:solidFill>
+                <a:effectLst/>
+                <a:latin typeface="Times New Roman" panose="02020603050405020304" pitchFamily="18" charset="0"/>
+                <a:cs typeface="Times New Roman" panose="02020603050405020304" pitchFamily="18" charset="0"/>
+              </a:rPr>
+              <a:t>Accident locations based on user-reported coordinates → possible location inaccuracies</a:t>
+            </a:r>
+          </a:p>
+          <a:p>
+            <a:pPr marL="0" marR="0" lvl="0" indent="0" algn="l" defTabSz="914400" rtl="0" eaLnBrk="0" fontAlgn="base" latinLnBrk="0" hangingPunct="0">
+              <a:lnSpc>
+                <a:spcPct val="150000"/>
+              </a:lnSpc>
+              <a:spcBef>
+                <a:spcPct val="0"/>
+              </a:spcBef>
+              <a:spcAft>
+                <a:spcPct val="0"/>
+              </a:spcAft>
+              <a:buClrTx/>
+              <a:buSzTx/>
+              <a:buFontTx/>
+              <a:buChar char="•"/>
+              <a:tabLst/>
+            </a:pPr>
+            <a:r>
+              <a:rPr kumimoji="0" lang="en-US" altLang="en-US" sz="2200" b="0" i="0" u="none" strike="noStrike" cap="none" normalizeH="0" baseline="0" dirty="0">
+                <a:ln>
+                  <a:noFill/>
+                </a:ln>
+                <a:solidFill>
+                  <a:schemeClr val="tx1"/>
+                </a:solidFill>
+                <a:effectLst/>
+                <a:latin typeface="Times New Roman" panose="02020603050405020304" pitchFamily="18" charset="0"/>
+                <a:cs typeface="Times New Roman" panose="02020603050405020304" pitchFamily="18" charset="0"/>
+              </a:rPr>
+              <a:t>Excludes road infrastructure factors (road condition, lighting, signage, traffic volume)</a:t>
+            </a:r>
+          </a:p>
+          <a:p>
+            <a:pPr marL="0" marR="0" lvl="0" indent="0" algn="l" defTabSz="914400" rtl="0" eaLnBrk="0" fontAlgn="base" latinLnBrk="0" hangingPunct="0">
+              <a:lnSpc>
+                <a:spcPct val="150000"/>
+              </a:lnSpc>
+              <a:spcBef>
+                <a:spcPct val="0"/>
+              </a:spcBef>
+              <a:spcAft>
+                <a:spcPct val="0"/>
+              </a:spcAft>
+              <a:buClrTx/>
+              <a:buSzTx/>
+              <a:buFontTx/>
+              <a:buChar char="•"/>
+              <a:tabLst/>
+            </a:pPr>
+            <a:r>
+              <a:rPr kumimoji="0" lang="en-US" altLang="en-US" sz="2200" b="0" i="0" u="none" strike="noStrike" cap="none" normalizeH="0" baseline="0" dirty="0">
+                <a:ln>
+                  <a:noFill/>
+                </a:ln>
+                <a:solidFill>
+                  <a:schemeClr val="tx1"/>
+                </a:solidFill>
+                <a:effectLst/>
+                <a:latin typeface="Times New Roman" panose="02020603050405020304" pitchFamily="18" charset="0"/>
+                <a:cs typeface="Times New Roman" panose="02020603050405020304" pitchFamily="18" charset="0"/>
+              </a:rPr>
+              <a:t>Limited to the dataset time period → may not reflect long-term accident trends</a:t>
+            </a:r>
+          </a:p>
+          <a:p>
+            <a:pPr marL="0" marR="0" lvl="0" indent="0" algn="l" defTabSz="914400" rtl="0" eaLnBrk="0" fontAlgn="base" latinLnBrk="0" hangingPunct="0">
+              <a:lnSpc>
+                <a:spcPct val="150000"/>
+              </a:lnSpc>
+              <a:spcBef>
+                <a:spcPct val="0"/>
+              </a:spcBef>
+              <a:spcAft>
+                <a:spcPct val="0"/>
+              </a:spcAft>
+              <a:buClrTx/>
+              <a:buSzTx/>
+              <a:buFontTx/>
+              <a:buChar char="•"/>
+              <a:tabLst/>
+            </a:pPr>
+            <a:r>
+              <a:rPr kumimoji="0" lang="en-US" altLang="en-US" sz="2200" b="0" i="0" u="none" strike="noStrike" cap="none" normalizeH="0" baseline="0" dirty="0">
+                <a:ln>
+                  <a:noFill/>
+                </a:ln>
+                <a:solidFill>
+                  <a:schemeClr val="tx1"/>
+                </a:solidFill>
+                <a:effectLst/>
+                <a:latin typeface="Times New Roman" panose="02020603050405020304" pitchFamily="18" charset="0"/>
+                <a:cs typeface="Times New Roman" panose="02020603050405020304" pitchFamily="18" charset="0"/>
+              </a:rPr>
+              <a:t>Does not account for driver behavior (speeding, alcohol use, driver experience)</a:t>
+            </a:r>
+          </a:p>
+        </p:txBody>
+      </p:sp>
+    </p:spTree>
+    <p:extLst>
+      <p:ext uri="{BB962C8B-B14F-4D97-AF65-F5344CB8AC3E}">
+        <p14:creationId xmlns:p14="http://schemas.microsoft.com/office/powerpoint/2010/main" val="4144617926"/>
+      </p:ext>
+    </p:extLst>
+  </p:cSld>
+  <p:clrMapOvr>
+    <a:masterClrMapping/>
+  </p:clrMapOvr>
+</p:sld>
+</file>
+
+<file path=ppt/slides/slide22.xml><?xml version="1.0" encoding="utf-8"?>
 <p:sld xmlns:a="http://schemas.openxmlformats.org/drawingml/2006/main" xmlns:r="http://schemas.openxmlformats.org/officeDocument/2006/relationships" xmlns:p="http://schemas.openxmlformats.org/presentationml/2006/main">
   <p:cSld>
     <p:spTree>
@@ -13631,25 +13929,11 @@
               <a:buChar char="•"/>
             </a:pPr>
             <a:r>
-              <a:rPr lang="en-US" dirty="0">
+              <a:rPr lang="en-US" sz="2200" dirty="0">
                 <a:latin typeface="Times New Roman" panose="02020603050405020304" pitchFamily="18" charset="0"/>
                 <a:cs typeface="Times New Roman" panose="02020603050405020304" pitchFamily="18" charset="0"/>
               </a:rPr>
-              <a:t>Road traffic crashes in Kenya show clear </a:t>
-            </a:r>
-            <a:r>
-              <a:rPr lang="en-US" b="1" dirty="0">
-                <a:latin typeface="Times New Roman" panose="02020603050405020304" pitchFamily="18" charset="0"/>
-                <a:cs typeface="Times New Roman" panose="02020603050405020304" pitchFamily="18" charset="0"/>
-              </a:rPr>
-              <a:t>spatial and temporal patterns</a:t>
-            </a:r>
-            <a:r>
-              <a:rPr lang="en-US" dirty="0">
-                <a:latin typeface="Times New Roman" panose="02020603050405020304" pitchFamily="18" charset="0"/>
-                <a:cs typeface="Times New Roman" panose="02020603050405020304" pitchFamily="18" charset="0"/>
-              </a:rPr>
-              <a:t>, with higher concentrations in urban areas and major highways</a:t>
+              <a:t>Road traffic crashes in Kenya show clear spatial and temporal patterns, with higher concentrations in urban areas and major highways</a:t>
             </a:r>
           </a:p>
           <a:p>
@@ -13658,30 +13942,12 @@
               <a:buChar char="•"/>
             </a:pPr>
             <a:r>
-              <a:rPr lang="en-US" b="1" dirty="0">
+              <a:rPr lang="en-US" sz="2200" dirty="0">
                 <a:latin typeface="Times New Roman" panose="02020603050405020304" pitchFamily="18" charset="0"/>
                 <a:cs typeface="Times New Roman" panose="02020603050405020304" pitchFamily="18" charset="0"/>
               </a:rPr>
-              <a:t>Matatus</a:t>
-            </a:r>
-            <a:r>
-              <a:rPr lang="en-US" dirty="0">
-                <a:latin typeface="Times New Roman" panose="02020603050405020304" pitchFamily="18" charset="0"/>
-                <a:cs typeface="Times New Roman" panose="02020603050405020304" pitchFamily="18" charset="0"/>
-              </a:rPr>
-              <a:t> are involved in the highest number of crashes, but most are </a:t>
-            </a:r>
-            <a:r>
-              <a:rPr lang="en-US" b="1" dirty="0">
-                <a:latin typeface="Times New Roman" panose="02020603050405020304" pitchFamily="18" charset="0"/>
-                <a:cs typeface="Times New Roman" panose="02020603050405020304" pitchFamily="18" charset="0"/>
-              </a:rPr>
-              <a:t>non‑fatal</a:t>
-            </a:r>
-            <a:endParaRPr lang="en-US" dirty="0">
-              <a:latin typeface="Times New Roman" panose="02020603050405020304" pitchFamily="18" charset="0"/>
-              <a:cs typeface="Times New Roman" panose="02020603050405020304" pitchFamily="18" charset="0"/>
-            </a:endParaRPr>
+              <a:t>Matatus are involved in the highest number of crashes, but most are non‑fatal</a:t>
+            </a:r>
           </a:p>
           <a:p>
             <a:pPr>
@@ -13689,32 +13955,11 @@
               <a:buChar char="•"/>
             </a:pPr>
             <a:r>
-              <a:rPr lang="en-US" b="1" dirty="0">
+              <a:rPr lang="en-US" sz="2200" dirty="0">
                 <a:latin typeface="Times New Roman" panose="02020603050405020304" pitchFamily="18" charset="0"/>
                 <a:cs typeface="Times New Roman" panose="02020603050405020304" pitchFamily="18" charset="0"/>
               </a:rPr>
-              <a:t>Pedestrians and motorcyclists</a:t>
-            </a:r>
-            <a:r>
-              <a:rPr lang="en-US" dirty="0">
-                <a:latin typeface="Times New Roman" panose="02020603050405020304" pitchFamily="18" charset="0"/>
-                <a:cs typeface="Times New Roman" panose="02020603050405020304" pitchFamily="18" charset="0"/>
-              </a:rPr>
-              <a:t> face the highest risk of </a:t>
-            </a:r>
-            <a:r>
-              <a:rPr lang="en-US" b="1" dirty="0">
-                <a:latin typeface="Times New Roman" panose="02020603050405020304" pitchFamily="18" charset="0"/>
-                <a:cs typeface="Times New Roman" panose="02020603050405020304" pitchFamily="18" charset="0"/>
-              </a:rPr>
-              <a:t>fatal outcomes</a:t>
-            </a:r>
-            <a:r>
-              <a:rPr lang="en-US" dirty="0">
-                <a:latin typeface="Times New Roman" panose="02020603050405020304" pitchFamily="18" charset="0"/>
-                <a:cs typeface="Times New Roman" panose="02020603050405020304" pitchFamily="18" charset="0"/>
-              </a:rPr>
-              <a:t>, highlighting their vulnerability</a:t>
+              <a:t>Pedestrians and motorcyclists face the highest risk of fatal outcomes, highlighting their vulnerability</a:t>
             </a:r>
           </a:p>
           <a:p>
@@ -13723,25 +13968,11 @@
               <a:buChar char="•"/>
             </a:pPr>
             <a:r>
-              <a:rPr lang="en-US" dirty="0">
+              <a:rPr lang="en-US" sz="2200" dirty="0">
                 <a:latin typeface="Times New Roman" panose="02020603050405020304" pitchFamily="18" charset="0"/>
                 <a:cs typeface="Times New Roman" panose="02020603050405020304" pitchFamily="18" charset="0"/>
               </a:rPr>
-              <a:t>Crash </a:t>
-            </a:r>
-            <a:r>
-              <a:rPr lang="en-US" b="1" dirty="0">
-                <a:latin typeface="Times New Roman" panose="02020603050405020304" pitchFamily="18" charset="0"/>
-                <a:cs typeface="Times New Roman" panose="02020603050405020304" pitchFamily="18" charset="0"/>
-              </a:rPr>
-              <a:t>severity is driven more by road user type</a:t>
-            </a:r>
-            <a:r>
-              <a:rPr lang="en-US" dirty="0">
-                <a:latin typeface="Times New Roman" panose="02020603050405020304" pitchFamily="18" charset="0"/>
-                <a:cs typeface="Times New Roman" panose="02020603050405020304" pitchFamily="18" charset="0"/>
-              </a:rPr>
-              <a:t> than by time or location</a:t>
+              <a:t>Crash severity is driven more by road user type than by time or location</a:t>
             </a:r>
           </a:p>
           <a:p>
@@ -13750,23 +13981,12 @@
               <a:buChar char="•"/>
             </a:pPr>
             <a:r>
-              <a:rPr lang="en-US" dirty="0">
+              <a:rPr lang="en-US" sz="2200" dirty="0">
                 <a:latin typeface="Times New Roman" panose="02020603050405020304" pitchFamily="18" charset="0"/>
                 <a:cs typeface="Times New Roman" panose="02020603050405020304" pitchFamily="18" charset="0"/>
               </a:rPr>
-              <a:t>Spatial hotspot analysis is effective for identifying </a:t>
-            </a:r>
-            <a:r>
-              <a:rPr lang="en-US" b="1" dirty="0">
-                <a:latin typeface="Times New Roman" panose="02020603050405020304" pitchFamily="18" charset="0"/>
-                <a:cs typeface="Times New Roman" panose="02020603050405020304" pitchFamily="18" charset="0"/>
-              </a:rPr>
-              <a:t>priority areas for intervention</a:t>
-            </a:r>
-            <a:endParaRPr lang="en-US" dirty="0">
-              <a:latin typeface="Times New Roman" panose="02020603050405020304" pitchFamily="18" charset="0"/>
-              <a:cs typeface="Times New Roman" panose="02020603050405020304" pitchFamily="18" charset="0"/>
-            </a:endParaRPr>
+              <a:t>Spatial hotspot analysis is effective for identifying priority areas for intervention</a:t>
+            </a:r>
           </a:p>
           <a:p>
             <a:pPr>
@@ -13774,25 +13994,11 @@
               <a:buChar char="•"/>
             </a:pPr>
             <a:r>
-              <a:rPr lang="en-US" dirty="0">
+              <a:rPr lang="en-US" sz="2200" dirty="0">
                 <a:latin typeface="Times New Roman" panose="02020603050405020304" pitchFamily="18" charset="0"/>
                 <a:cs typeface="Times New Roman" panose="02020603050405020304" pitchFamily="18" charset="0"/>
               </a:rPr>
-              <a:t>The </a:t>
-            </a:r>
-            <a:r>
-              <a:rPr lang="en-US" b="1" dirty="0">
-                <a:latin typeface="Times New Roman" panose="02020603050405020304" pitchFamily="18" charset="0"/>
-                <a:cs typeface="Times New Roman" panose="02020603050405020304" pitchFamily="18" charset="0"/>
-              </a:rPr>
-              <a:t>Negative Binomial model</a:t>
-            </a:r>
-            <a:r>
-              <a:rPr lang="en-US" dirty="0">
-                <a:latin typeface="Times New Roman" panose="02020603050405020304" pitchFamily="18" charset="0"/>
-                <a:cs typeface="Times New Roman" panose="02020603050405020304" pitchFamily="18" charset="0"/>
-              </a:rPr>
-              <a:t> provided more reliable estimates by accounting for overdispersion</a:t>
+              <a:t>The Negative Binomial model provided more reliable estimates by accounting for overdispersion</a:t>
             </a:r>
           </a:p>
           <a:p>
@@ -13801,25 +14007,11 @@
               <a:buChar char="•"/>
             </a:pPr>
             <a:r>
-              <a:rPr lang="en-US" dirty="0">
+              <a:rPr lang="en-US" sz="2200" dirty="0">
                 <a:latin typeface="Times New Roman" panose="02020603050405020304" pitchFamily="18" charset="0"/>
                 <a:cs typeface="Times New Roman" panose="02020603050405020304" pitchFamily="18" charset="0"/>
               </a:rPr>
-              <a:t>Improving safety for </a:t>
-            </a:r>
-            <a:r>
-              <a:rPr lang="en-US" b="1" dirty="0">
-                <a:latin typeface="Times New Roman" panose="02020603050405020304" pitchFamily="18" charset="0"/>
-                <a:cs typeface="Times New Roman" panose="02020603050405020304" pitchFamily="18" charset="0"/>
-              </a:rPr>
-              <a:t>vulnerable road users</a:t>
-            </a:r>
-            <a:r>
-              <a:rPr lang="en-US" dirty="0">
-                <a:latin typeface="Times New Roman" panose="02020603050405020304" pitchFamily="18" charset="0"/>
-                <a:cs typeface="Times New Roman" panose="02020603050405020304" pitchFamily="18" charset="0"/>
-              </a:rPr>
-              <a:t> is key to reducing road traffic fatalities in Kenya</a:t>
+              <a:t>Improving safety for vulnerable road users is key to reducing road traffic fatalities in Kenya</a:t>
             </a:r>
           </a:p>
         </p:txBody>
@@ -13837,7 +14029,7 @@
 </p:sld>
 </file>
 
-<file path=ppt/slides/slide22.xml><?xml version="1.0" encoding="utf-8"?>
+<file path=ppt/slides/slide23.xml><?xml version="1.0" encoding="utf-8"?>
 <p:sld xmlns:a="http://schemas.openxmlformats.org/drawingml/2006/main" xmlns:r="http://schemas.openxmlformats.org/officeDocument/2006/relationships" xmlns:p="http://schemas.openxmlformats.org/presentationml/2006/main">
   <p:cSld>
     <p:spTree>
@@ -14851,7 +15043,7 @@
         <p:spPr>
           <a:xfrm>
             <a:off x="717755" y="1139587"/>
-            <a:ext cx="9901084" cy="4457952"/>
+            <a:ext cx="9901084" cy="4653646"/>
           </a:xfrm>
           <a:prstGeom prst="rect">
             <a:avLst/>
@@ -14864,6 +15056,48 @@
           </a:bodyPr>
           <a:lstStyle/>
           <a:p>
+            <a:r>
+              <a:rPr lang="en-US" sz="2400" b="1" u="sng" dirty="0">
+                <a:latin typeface="Times New Roman" panose="02020603050405020304" pitchFamily="18" charset="0"/>
+                <a:cs typeface="Times New Roman" panose="02020603050405020304" pitchFamily="18" charset="0"/>
+              </a:rPr>
+              <a:t>General Objective</a:t>
+            </a:r>
+          </a:p>
+          <a:p>
+            <a:r>
+              <a:rPr lang="en-US" sz="2000" dirty="0">
+                <a:latin typeface="Times New Roman" panose="02020603050405020304" pitchFamily="18" charset="0"/>
+                <a:cs typeface="Times New Roman" panose="02020603050405020304" pitchFamily="18" charset="0"/>
+              </a:rPr>
+              <a:t>To analyze the spatial, temporal, and severity patterns of road traffic accidents in Kenya using geo‑referenced crash data in order to inform evidence‑based road safety interventions.</a:t>
+            </a:r>
+            <a:br>
+              <a:rPr lang="en-US" sz="2000" dirty="0">
+                <a:latin typeface="Times New Roman" panose="02020603050405020304" pitchFamily="18" charset="0"/>
+                <a:cs typeface="Times New Roman" panose="02020603050405020304" pitchFamily="18" charset="0"/>
+              </a:rPr>
+            </a:br>
+            <a:endParaRPr lang="en-US" sz="2000" dirty="0">
+              <a:latin typeface="Times New Roman" panose="02020603050405020304" pitchFamily="18" charset="0"/>
+              <a:cs typeface="Times New Roman" panose="02020603050405020304" pitchFamily="18" charset="0"/>
+            </a:endParaRPr>
+          </a:p>
+          <a:p>
+            <a:pPr>
+              <a:lnSpc>
+                <a:spcPct val="150000"/>
+              </a:lnSpc>
+            </a:pPr>
+            <a:r>
+              <a:rPr lang="en-US" sz="2400" b="1" u="sng" dirty="0">
+                <a:latin typeface="Times New Roman" panose="02020603050405020304" pitchFamily="18" charset="0"/>
+                <a:cs typeface="Times New Roman" panose="02020603050405020304" pitchFamily="18" charset="0"/>
+              </a:rPr>
+              <a:t>Specific objectives</a:t>
+            </a:r>
+          </a:p>
+          <a:p>
             <a:pPr marL="342900" indent="-342900">
               <a:lnSpc>
                 <a:spcPct val="150000"/>
@@ -14872,11 +15106,11 @@
               <a:buChar char="•"/>
             </a:pPr>
             <a:r>
-              <a:rPr lang="en-US" sz="2400" dirty="0">
+              <a:rPr lang="en-US" sz="2000" dirty="0">
                 <a:latin typeface="Times New Roman" panose="02020603050405020304" pitchFamily="18" charset="0"/>
                 <a:cs typeface="Times New Roman" panose="02020603050405020304" pitchFamily="18" charset="0"/>
               </a:rPr>
-              <a:t>Analyze when road accidents occur (by hour, day, and month)</a:t>
+              <a:t>To analyze when road accidents occur (by hour, day, and month)</a:t>
             </a:r>
           </a:p>
           <a:p>
@@ -14888,11 +15122,11 @@
               <a:buChar char="•"/>
             </a:pPr>
             <a:r>
-              <a:rPr lang="en-US" sz="2400" dirty="0">
+              <a:rPr lang="en-US" sz="2000" dirty="0">
                 <a:latin typeface="Times New Roman" panose="02020603050405020304" pitchFamily="18" charset="0"/>
                 <a:cs typeface="Times New Roman" panose="02020603050405020304" pitchFamily="18" charset="0"/>
               </a:rPr>
-              <a:t>Identify accident hotspot locations across Kenya</a:t>
+              <a:t>To identify accident hotspot locations across Kenya</a:t>
             </a:r>
           </a:p>
           <a:p>
@@ -14904,11 +15138,11 @@
               <a:buChar char="•"/>
             </a:pPr>
             <a:r>
-              <a:rPr lang="en-US" sz="2400" dirty="0">
+              <a:rPr lang="en-US" sz="2000" dirty="0">
                 <a:latin typeface="Times New Roman" panose="02020603050405020304" pitchFamily="18" charset="0"/>
                 <a:cs typeface="Times New Roman" panose="02020603050405020304" pitchFamily="18" charset="0"/>
               </a:rPr>
-              <a:t>Examine how road user types (pedestrians, motorcyclists, matatus) relate to crash fatality</a:t>
+              <a:t>To examine how road user types (pedestrians, motorcyclists, matatus) relate to crash fatality</a:t>
             </a:r>
           </a:p>
           <a:p>
@@ -14920,11 +15154,11 @@
               <a:buChar char="•"/>
             </a:pPr>
             <a:r>
-              <a:rPr lang="en-US" sz="2400" dirty="0">
+              <a:rPr lang="en-US" sz="2000" dirty="0">
                 <a:latin typeface="Times New Roman" panose="02020603050405020304" pitchFamily="18" charset="0"/>
                 <a:cs typeface="Times New Roman" panose="02020603050405020304" pitchFamily="18" charset="0"/>
               </a:rPr>
-              <a:t>Determine factors influencing fatal crashes using correlation and logistic regression</a:t>
+              <a:t>To determine factors influencing fatal crashes using correlation and logistic regression</a:t>
             </a:r>
           </a:p>
           <a:p>
@@ -14936,11 +15170,11 @@
               <a:buChar char="•"/>
             </a:pPr>
             <a:r>
-              <a:rPr lang="en-US" sz="2400" dirty="0">
+              <a:rPr lang="en-US" sz="2000" dirty="0">
                 <a:latin typeface="Times New Roman" panose="02020603050405020304" pitchFamily="18" charset="0"/>
                 <a:cs typeface="Times New Roman" panose="02020603050405020304" pitchFamily="18" charset="0"/>
               </a:rPr>
-              <a:t>Provide data‑driven insights and policy recommendations to improve road safety in Kenya</a:t>
+              <a:t>To provide data‑driven insights and policy recommendations to improve road safety in Kenya</a:t>
             </a:r>
           </a:p>
         </p:txBody>
@@ -15053,8 +15287,26 @@
                 <a:latin typeface="Times New Roman" panose="02020603050405020304" pitchFamily="18" charset="0"/>
                 <a:cs typeface="Times New Roman" panose="02020603050405020304" pitchFamily="18" charset="0"/>
               </a:rPr>
-              <a:t>The study uses secondary data from World Bank Open Data on road traffic accidents in Kenya.</a:t>
-            </a:r>
+              <a:t>The study uses secondary data from World Bank Open Data on road traffic accidents in Kenya from 2017-2018. </a:t>
+            </a:r>
+            <a:r>
+              <a:rPr lang="en-US" dirty="0"/>
+              <a:t>(</a:t>
+            </a:r>
+            <a:r>
+              <a:rPr lang="en-US" u="sng" dirty="0">
+                <a:hlinkClick r:id="rId2"/>
+              </a:rPr>
+              <a:t>https://data.worldbank.org/country/kenya</a:t>
+            </a:r>
+            <a:r>
+              <a:rPr lang="en-US" dirty="0"/>
+              <a:t> )  </a:t>
+            </a:r>
+            <a:endParaRPr lang="en-US" dirty="0">
+              <a:latin typeface="Times New Roman" panose="02020603050405020304" pitchFamily="18" charset="0"/>
+              <a:cs typeface="Times New Roman" panose="02020603050405020304" pitchFamily="18" charset="0"/>
+            </a:endParaRPr>
           </a:p>
           <a:p>
             <a:pPr>
